--- a/deliverables/HourlyPowerData_snapshot.pptx
+++ b/deliverables/HourlyPowerData_snapshot.pptx
@@ -19384,7 +19384,7 @@
               <a:rPr sz="1200" b="0">
                 <a:latin typeface="Arial"/>
               </a:rPr>
-              <a:t>Data as of 10 September 2026</a:t>
+              <a:t>Data as of 18 September 2026</a:t>
             </a:r>
           </a:p>
         </p:txBody>

--- a/deliverables/HourlyPowerData_snapshot.pptx
+++ b/deliverables/HourlyPowerData_snapshot.pptx
@@ -19384,7 +19384,7 @@
               <a:rPr sz="1200" b="0">
                 <a:latin typeface="Arial"/>
               </a:rPr>
-              <a:t>Data as of 18 September 2026</a:t>
+              <a:t>Data as of 26 September 2026</a:t>
             </a:r>
           </a:p>
         </p:txBody>

--- a/deliverables/HourlyPowerData_snapshot.pptx
+++ b/deliverables/HourlyPowerData_snapshot.pptx
@@ -19384,7 +19384,7 @@
               <a:rPr sz="1200" b="0">
                 <a:latin typeface="Arial"/>
               </a:rPr>
-              <a:t>Data as of 26 September 2026</a:t>
+              <a:t>Data as of 2 October 2026</a:t>
             </a:r>
           </a:p>
         </p:txBody>

--- a/deliverables/HourlyPowerData_snapshot.pptx
+++ b/deliverables/HourlyPowerData_snapshot.pptx
@@ -19384,7 +19384,7 @@
               <a:rPr sz="1200" b="0">
                 <a:latin typeface="Arial"/>
               </a:rPr>
-              <a:t>Data as of 2 October 2026</a:t>
+              <a:t>Data as of 9 October 2026</a:t>
             </a:r>
           </a:p>
         </p:txBody>

--- a/deliverables/HourlyPowerData_snapshot.pptx
+++ b/deliverables/HourlyPowerData_snapshot.pptx
@@ -19384,7 +19384,7 @@
               <a:rPr sz="1200" b="0">
                 <a:latin typeface="Arial"/>
               </a:rPr>
-              <a:t>Data as of 9 October 2026</a:t>
+              <a:t>Data as of 18 October 2026</a:t>
             </a:r>
           </a:p>
         </p:txBody>
